--- a/P1/Dissemination/P1_Presentation.pptx
+++ b/P1/Dissemination/P1_Presentation.pptx
@@ -113,13 +113,18 @@
       </a:defRPr>
     </a:lvl9pPr>
   </p:defaultTextStyle>
+  <p:extLst>
+    <p:ext uri="{EFAFB233-063F-42B5-8137-9DF3F51BA10A}">
+      <p15:sldGuideLst xmlns:p15="http://schemas.microsoft.com/office/powerpoint/2012/main"/>
+    </p:ext>
+  </p:extLst>
 </p:presentation>
 </file>
 
 <file path=ppt/revisionInfo.xml><?xml version="1.0" encoding="utf-8"?>
 <p1510:revInfo xmlns:a="http://schemas.openxmlformats.org/drawingml/2006/main" xmlns:r="http://schemas.openxmlformats.org/officeDocument/2006/relationships" xmlns:p1510="http://schemas.microsoft.com/office/powerpoint/2015/10/main">
   <p1510:revLst>
-    <p1510:client id="{D8AA4D66-65EB-4A1D-819D-11B87478C751}" v="14" dt="2026-03-02T06:29:26.012"/>
+    <p1510:client id="{D8AA4D66-65EB-4A1D-819D-11B87478C751}" v="17" dt="2026-03-02T07:00:50.480"/>
   </p1510:revLst>
 </p1510:revInfo>
 </file>
@@ -129,7 +134,7 @@
   <pc:docChgLst>
     <pc:chgData name="Ezra Weible" userId="67bcaf2f89c4552e" providerId="LiveId" clId="{E4E19776-AA89-4579-B0CB-50FEF10C4E93}"/>
     <pc:docChg chg="undo redo custSel addSld delSld modSld">
-      <pc:chgData name="Ezra Weible" userId="67bcaf2f89c4552e" providerId="LiveId" clId="{E4E19776-AA89-4579-B0CB-50FEF10C4E93}" dt="2026-03-02T06:29:32.647" v="1555" actId="404"/>
+      <pc:chgData name="Ezra Weible" userId="67bcaf2f89c4552e" providerId="LiveId" clId="{E4E19776-AA89-4579-B0CB-50FEF10C4E93}" dt="2026-03-02T07:02:21.700" v="3054" actId="20577"/>
       <pc:docMkLst>
         <pc:docMk/>
       </pc:docMkLst>
@@ -171,8 +176,8 @@
           </ac:picMkLst>
         </pc:picChg>
       </pc:sldChg>
-      <pc:sldChg chg="addSp delSp modSp add mod">
-        <pc:chgData name="Ezra Weible" userId="67bcaf2f89c4552e" providerId="LiveId" clId="{E4E19776-AA89-4579-B0CB-50FEF10C4E93}" dt="2026-03-02T06:10:23.602" v="170" actId="1076"/>
+      <pc:sldChg chg="addSp delSp modSp add mod modNotesTx">
+        <pc:chgData name="Ezra Weible" userId="67bcaf2f89c4552e" providerId="LiveId" clId="{E4E19776-AA89-4579-B0CB-50FEF10C4E93}" dt="2026-03-02T06:47:08.575" v="1905" actId="20577"/>
         <pc:sldMkLst>
           <pc:docMk/>
           <pc:sldMk cId="3886421937" sldId="258"/>
@@ -202,8 +207,8 @@
           </ac:picMkLst>
         </pc:picChg>
       </pc:sldChg>
-      <pc:sldChg chg="modSp new mod">
-        <pc:chgData name="Ezra Weible" userId="67bcaf2f89c4552e" providerId="LiveId" clId="{E4E19776-AA89-4579-B0CB-50FEF10C4E93}" dt="2026-03-02T06:18:17.666" v="966" actId="20577"/>
+      <pc:sldChg chg="modSp new mod modNotesTx">
+        <pc:chgData name="Ezra Weible" userId="67bcaf2f89c4552e" providerId="LiveId" clId="{E4E19776-AA89-4579-B0CB-50FEF10C4E93}" dt="2026-03-02T06:50:17.482" v="2384" actId="14"/>
         <pc:sldMkLst>
           <pc:docMk/>
           <pc:sldMk cId="387199353" sldId="259"/>
@@ -225,14 +230,14 @@
           </ac:spMkLst>
         </pc:spChg>
       </pc:sldChg>
-      <pc:sldChg chg="addSp delSp modSp add mod">
-        <pc:chgData name="Ezra Weible" userId="67bcaf2f89c4552e" providerId="LiveId" clId="{E4E19776-AA89-4579-B0CB-50FEF10C4E93}" dt="2026-03-02T06:13:01.281" v="266" actId="1076"/>
+      <pc:sldChg chg="addSp delSp modSp add mod modNotesTx">
+        <pc:chgData name="Ezra Weible" userId="67bcaf2f89c4552e" providerId="LiveId" clId="{E4E19776-AA89-4579-B0CB-50FEF10C4E93}" dt="2026-03-02T06:48:35.489" v="2097" actId="1076"/>
         <pc:sldMkLst>
           <pc:docMk/>
           <pc:sldMk cId="3662945949" sldId="260"/>
         </pc:sldMkLst>
         <pc:spChg chg="add mod">
-          <ac:chgData name="Ezra Weible" userId="67bcaf2f89c4552e" providerId="LiveId" clId="{E4E19776-AA89-4579-B0CB-50FEF10C4E93}" dt="2026-03-02T06:13:01.281" v="266" actId="1076"/>
+          <ac:chgData name="Ezra Weible" userId="67bcaf2f89c4552e" providerId="LiveId" clId="{E4E19776-AA89-4579-B0CB-50FEF10C4E93}" dt="2026-03-02T06:48:35.489" v="2097" actId="1076"/>
           <ac:spMkLst>
             <pc:docMk/>
             <pc:sldMk cId="3662945949" sldId="260"/>
@@ -288,8 +293,8 @@
           </ac:picMkLst>
         </pc:picChg>
       </pc:sldChg>
-      <pc:sldChg chg="addSp delSp modSp new mod modAnim">
-        <pc:chgData name="Ezra Weible" userId="67bcaf2f89c4552e" providerId="LiveId" clId="{E4E19776-AA89-4579-B0CB-50FEF10C4E93}" dt="2026-03-02T06:24:35.201" v="1214" actId="1076"/>
+      <pc:sldChg chg="addSp delSp modSp new mod modAnim modNotesTx">
+        <pc:chgData name="Ezra Weible" userId="67bcaf2f89c4552e" providerId="LiveId" clId="{E4E19776-AA89-4579-B0CB-50FEF10C4E93}" dt="2026-03-02T06:52:06.804" v="2694" actId="20577"/>
         <pc:sldMkLst>
           <pc:docMk/>
           <pc:sldMk cId="3421660498" sldId="261"/>
@@ -335,8 +340,8 @@
           </ac:picMkLst>
         </pc:picChg>
       </pc:sldChg>
-      <pc:sldChg chg="addSp delSp modSp new mod">
-        <pc:chgData name="Ezra Weible" userId="67bcaf2f89c4552e" providerId="LiveId" clId="{E4E19776-AA89-4579-B0CB-50FEF10C4E93}" dt="2026-03-02T06:22:49.677" v="1010" actId="1076"/>
+      <pc:sldChg chg="addSp delSp modSp new mod modNotesTx">
+        <pc:chgData name="Ezra Weible" userId="67bcaf2f89c4552e" providerId="LiveId" clId="{E4E19776-AA89-4579-B0CB-50FEF10C4E93}" dt="2026-03-02T07:02:21.700" v="3054" actId="20577"/>
         <pc:sldMkLst>
           <pc:docMk/>
           <pc:sldMk cId="4241141346" sldId="262"/>
@@ -347,6 +352,14 @@
             <pc:docMk/>
             <pc:sldMk cId="4241141346" sldId="262"/>
             <ac:spMk id="2" creationId="{797F2C28-C500-6BBE-8421-48D477758A8A}"/>
+          </ac:spMkLst>
+        </pc:spChg>
+        <pc:spChg chg="add mod">
+          <ac:chgData name="Ezra Weible" userId="67bcaf2f89c4552e" providerId="LiveId" clId="{E4E19776-AA89-4579-B0CB-50FEF10C4E93}" dt="2026-03-02T07:00:57.801" v="2722" actId="27636"/>
+          <ac:spMkLst>
+            <pc:docMk/>
+            <pc:sldMk cId="4241141346" sldId="262"/>
+            <ac:spMk id="3" creationId="{53376DF1-8DE5-D260-301B-8DBEDDB2F2E2}"/>
           </ac:spMkLst>
         </pc:spChg>
         <pc:spChg chg="del">
@@ -787,55 +800,13 @@
           <a:bodyPr/>
           <a:lstStyle/>
           <a:p>
-            <a:pPr marL="171450" indent="-171450">
+            <a:pPr marL="0" indent="0">
               <a:buFontTx/>
-              <a:buChar char="-"/>
+              <a:buNone/>
             </a:pPr>
-            <a:endParaRPr lang="en-US" dirty="0"/>
-          </a:p>
-          <a:p>
-            <a:pPr marL="171450" indent="-171450">
-              <a:buFontTx/>
-              <a:buChar char="-"/>
-            </a:pPr>
             <a:r>
               <a:rPr lang="en-US" dirty="0"/>
-              <a:t>Here I’m looking at whether baseline hard drug use affects how well people respond to HAART two years later.</a:t>
-            </a:r>
-          </a:p>
-          <a:p>
-            <a:pPr marL="171450" indent="-171450">
-              <a:buFontTx/>
-              <a:buChar char="-"/>
-            </a:pPr>
-            <a:r>
-              <a:rPr lang="en-US" dirty="0"/>
-              <a:t>The outcomes I’m focusing on are viral load on the log10 scale, CD4 count, and physical and mental quality‑of‑life scores. Hard drug use at baseline is the </a:t>
-            </a:r>
-            <a:r>
-              <a:rPr lang="en-US"/>
-              <a:t>main predictor</a:t>
-            </a:r>
-            <a:endParaRPr lang="en-US" dirty="0"/>
-          </a:p>
-          <a:p>
-            <a:pPr marL="171450" indent="-171450">
-              <a:buFontTx/>
-              <a:buChar char="-"/>
-            </a:pPr>
-            <a:r>
-              <a:rPr lang="en-US" dirty="0"/>
-              <a:t>The null hypothesis is that there’s no difference in year‑2 outcomes between baseline hard‑drug users and non‑users. I’m also keeping in mind what counts as a clinically meaningful difference: half a log10 for viral load, 50 CD4 cells, and 2 points on the QoL scales.</a:t>
-            </a:r>
-          </a:p>
-          <a:p>
-            <a:pPr marL="171450" indent="-171450">
-              <a:buFontTx/>
-              <a:buChar char="-"/>
-            </a:pPr>
-            <a:r>
-              <a:rPr lang="en-US" dirty="0"/>
-              <a:t>Figure 1 shows the distributions of the year‑2 outcomes, validating the log10 transformation of viral load</a:t>
+              <a:t>- As you can see, the distributions largely agree between those that reported using hard drugs and those that did not, though there are many more non-users present. You can see that the shape of the CD4 and physical quality of life figures are the most different by group. </a:t>
             </a:r>
           </a:p>
         </p:txBody>
@@ -926,7 +897,7 @@
             </a:pPr>
             <a:r>
               <a:rPr lang="en-US" dirty="0"/>
-              <a:t>This dataset includes 476 participants who had complete baseline and year‑2 measurements and reported baseline hard drug use.</a:t>
+              <a:t>This dataset includes 715 participants that were filtered to 463 who had complete baseline and year‑2 outcomes, baseline covariates, and year two adherence. This allows for easy comparison across models. </a:t>
             </a:r>
           </a:p>
           <a:p>
@@ -936,17 +907,7 @@
             </a:pPr>
             <a:r>
               <a:rPr lang="en-US" dirty="0"/>
-              <a:t>A few data issues needed attention: some BMI values were miscoded or implausible, and several categorical variables had very small categories, so I collapsed smoking, education, and race into two groups each.</a:t>
-            </a:r>
-          </a:p>
-          <a:p>
-            <a:pPr marL="171450" indent="-171450">
-              <a:buFontTx/>
-              <a:buChar char="-"/>
-            </a:pPr>
-            <a:r>
-              <a:rPr lang="en-US" dirty="0"/>
-              <a:t>Baseline characteristics by drug‑use group are summarized in Tables 1 and 2. Viral load is analyzed on the log10 scale, and we’re using complete‑case analysis for each outcome.</a:t>
+              <a:t>A few data issues needed attention: some BMI values were miscoded or implausible, and several categorical variables had very small categories that needed to be collapsed. Viral load is analyzed on the log10 scale.</a:t>
             </a:r>
           </a:p>
         </p:txBody>
@@ -978,6 +939,372 @@
     <p:extLst>
       <p:ext uri="{BB962C8B-B14F-4D97-AF65-F5344CB8AC3E}">
         <p14:creationId xmlns:p14="http://schemas.microsoft.com/office/powerpoint/2010/main" val="2555879641"/>
+      </p:ext>
+    </p:extLst>
+  </p:cSld>
+  <p:clrMapOvr>
+    <a:masterClrMapping/>
+  </p:clrMapOvr>
+</p:notes>
+</file>
+
+<file path=ppt/notesSlides/notesSlide3.xml><?xml version="1.0" encoding="utf-8"?>
+<p:notes xmlns:a="http://schemas.openxmlformats.org/drawingml/2006/main" xmlns:r="http://schemas.openxmlformats.org/officeDocument/2006/relationships" xmlns:p="http://schemas.openxmlformats.org/presentationml/2006/main">
+  <p:cSld>
+    <p:spTree>
+      <p:nvGrpSpPr>
+        <p:cNvPr id="1" name=""/>
+        <p:cNvGrpSpPr/>
+        <p:nvPr/>
+      </p:nvGrpSpPr>
+      <p:grpSpPr>
+        <a:xfrm>
+          <a:off x="0" y="0"/>
+          <a:ext cx="0" cy="0"/>
+          <a:chOff x="0" y="0"/>
+          <a:chExt cx="0" cy="0"/>
+        </a:xfrm>
+      </p:grpSpPr>
+      <p:sp>
+        <p:nvSpPr>
+          <p:cNvPr id="2" name="Slide Image Placeholder 1"/>
+          <p:cNvSpPr>
+            <a:spLocks noGrp="1" noRot="1" noChangeAspect="1"/>
+          </p:cNvSpPr>
+          <p:nvPr>
+            <p:ph type="sldImg"/>
+          </p:nvPr>
+        </p:nvSpPr>
+        <p:spPr/>
+      </p:sp>
+      <p:sp>
+        <p:nvSpPr>
+          <p:cNvPr id="3" name="Notes Placeholder 2"/>
+          <p:cNvSpPr>
+            <a:spLocks noGrp="1"/>
+          </p:cNvSpPr>
+          <p:nvPr>
+            <p:ph type="body" idx="1"/>
+          </p:nvPr>
+        </p:nvSpPr>
+        <p:spPr/>
+        <p:txBody>
+          <a:bodyPr/>
+          <a:lstStyle/>
+          <a:p>
+            <a:pPr marL="171450" indent="-171450">
+              <a:buFontTx/>
+              <a:buChar char="-"/>
+            </a:pPr>
+            <a:r>
+              <a:rPr lang="en-US" dirty="0"/>
+              <a:t>Frequentist and Bayesian approaches for a total of 16 models </a:t>
+            </a:r>
+          </a:p>
+          <a:p>
+            <a:pPr marL="171450" indent="-171450">
+              <a:buFontTx/>
+              <a:buChar char="-"/>
+            </a:pPr>
+            <a:r>
+              <a:rPr lang="en-US" dirty="0"/>
+              <a:t>No p-value adjustment for frequentist due to the prior specification of the importance of all outcomes, just noted in the discussion</a:t>
+            </a:r>
+          </a:p>
+          <a:p>
+            <a:pPr marL="171450" indent="-171450">
+              <a:buFontTx/>
+              <a:buChar char="-"/>
+            </a:pPr>
+            <a:r>
+              <a:rPr lang="en-US" dirty="0"/>
+              <a:t>Bayesian STAN used Hamiltonian Monte Carlo algorithm with the no-U-turn sampler </a:t>
+            </a:r>
+          </a:p>
+          <a:p>
+            <a:pPr marL="628650" lvl="1" indent="-171450">
+              <a:buFontTx/>
+              <a:buChar char="-"/>
+            </a:pPr>
+            <a:r>
+              <a:rPr lang="en-US" dirty="0"/>
+              <a:t>Diagnostics all looked good</a:t>
+            </a:r>
+          </a:p>
+          <a:p>
+            <a:pPr marL="171450" lvl="0" indent="-171450">
+              <a:buFontTx/>
+              <a:buChar char="-"/>
+            </a:pPr>
+            <a:endParaRPr lang="en-US" dirty="0"/>
+          </a:p>
+          <a:p>
+            <a:pPr marL="628650" lvl="1" indent="-171450">
+              <a:buFontTx/>
+              <a:buChar char="-"/>
+            </a:pPr>
+            <a:endParaRPr lang="en-US" dirty="0"/>
+          </a:p>
+          <a:p>
+            <a:pPr marL="0" indent="0">
+              <a:buFontTx/>
+              <a:buNone/>
+            </a:pPr>
+            <a:endParaRPr lang="en-US" dirty="0"/>
+          </a:p>
+        </p:txBody>
+      </p:sp>
+      <p:sp>
+        <p:nvSpPr>
+          <p:cNvPr id="4" name="Slide Number Placeholder 3"/>
+          <p:cNvSpPr>
+            <a:spLocks noGrp="1"/>
+          </p:cNvSpPr>
+          <p:nvPr>
+            <p:ph type="sldNum" sz="quarter" idx="5"/>
+          </p:nvPr>
+        </p:nvSpPr>
+        <p:spPr/>
+        <p:txBody>
+          <a:bodyPr/>
+          <a:lstStyle/>
+          <a:p>
+            <a:fld id="{B18332F0-876C-42EC-A93C-C92102BDEA90}" type="slidenum">
+              <a:rPr lang="en-US" smtClean="0"/>
+              <a:t>4</a:t>
+            </a:fld>
+            <a:endParaRPr lang="en-US"/>
+          </a:p>
+        </p:txBody>
+      </p:sp>
+    </p:spTree>
+    <p:extLst>
+      <p:ext uri="{BB962C8B-B14F-4D97-AF65-F5344CB8AC3E}">
+        <p14:creationId xmlns:p14="http://schemas.microsoft.com/office/powerpoint/2010/main" val="2627599936"/>
+      </p:ext>
+    </p:extLst>
+  </p:cSld>
+  <p:clrMapOvr>
+    <a:masterClrMapping/>
+  </p:clrMapOvr>
+</p:notes>
+</file>
+
+<file path=ppt/notesSlides/notesSlide4.xml><?xml version="1.0" encoding="utf-8"?>
+<p:notes xmlns:a="http://schemas.openxmlformats.org/drawingml/2006/main" xmlns:r="http://schemas.openxmlformats.org/officeDocument/2006/relationships" xmlns:p="http://schemas.openxmlformats.org/presentationml/2006/main">
+  <p:cSld>
+    <p:spTree>
+      <p:nvGrpSpPr>
+        <p:cNvPr id="1" name=""/>
+        <p:cNvGrpSpPr/>
+        <p:nvPr/>
+      </p:nvGrpSpPr>
+      <p:grpSpPr>
+        <a:xfrm>
+          <a:off x="0" y="0"/>
+          <a:ext cx="0" cy="0"/>
+          <a:chOff x="0" y="0"/>
+          <a:chExt cx="0" cy="0"/>
+        </a:xfrm>
+      </p:grpSpPr>
+      <p:sp>
+        <p:nvSpPr>
+          <p:cNvPr id="2" name="Slide Image Placeholder 1"/>
+          <p:cNvSpPr>
+            <a:spLocks noGrp="1" noRot="1" noChangeAspect="1"/>
+          </p:cNvSpPr>
+          <p:nvPr>
+            <p:ph type="sldImg"/>
+          </p:nvPr>
+        </p:nvSpPr>
+        <p:spPr/>
+      </p:sp>
+      <p:sp>
+        <p:nvSpPr>
+          <p:cNvPr id="3" name="Notes Placeholder 2"/>
+          <p:cNvSpPr>
+            <a:spLocks noGrp="1"/>
+          </p:cNvSpPr>
+          <p:nvPr>
+            <p:ph type="body" idx="1"/>
+          </p:nvPr>
+        </p:nvSpPr>
+        <p:spPr/>
+        <p:txBody>
+          <a:bodyPr/>
+          <a:lstStyle/>
+          <a:p>
+            <a:pPr marL="171450" indent="-171450">
+              <a:buFontTx/>
+              <a:buChar char="-"/>
+            </a:pPr>
+            <a:r>
+              <a:rPr lang="en-US" dirty="0"/>
+              <a:t>Clinically meaningful effect for CD4: 50 cells. Estimate and HPDI were lower and posterior probability was 1.000</a:t>
+            </a:r>
+          </a:p>
+          <a:p>
+            <a:pPr marL="171450" marR="0" lvl="0" indent="-171450" algn="l" defTabSz="914400" rtl="0" eaLnBrk="1" fontAlgn="auto" latinLnBrk="0" hangingPunct="1">
+              <a:lnSpc>
+                <a:spcPct val="100000"/>
+              </a:lnSpc>
+              <a:spcBef>
+                <a:spcPts val="0"/>
+              </a:spcBef>
+              <a:spcAft>
+                <a:spcPts val="0"/>
+              </a:spcAft>
+              <a:buClrTx/>
+              <a:buSzTx/>
+              <a:buFontTx/>
+              <a:buChar char="-"/>
+              <a:tabLst/>
+              <a:defRPr/>
+            </a:pPr>
+            <a:r>
+              <a:rPr lang="en-US" dirty="0"/>
+              <a:t>Clinically meaningful effect for physical quality of life: 2 points. Estimate was lower but HPDI overlapped with smaller posterior probability </a:t>
+            </a:r>
+          </a:p>
+          <a:p>
+            <a:pPr marL="171450" marR="0" lvl="0" indent="-171450" algn="l" defTabSz="914400" rtl="0" eaLnBrk="1" fontAlgn="auto" latinLnBrk="0" hangingPunct="1">
+              <a:lnSpc>
+                <a:spcPct val="100000"/>
+              </a:lnSpc>
+              <a:spcBef>
+                <a:spcPts val="0"/>
+              </a:spcBef>
+              <a:spcAft>
+                <a:spcPts val="0"/>
+              </a:spcAft>
+              <a:buClrTx/>
+              <a:buSzTx/>
+              <a:buFontTx/>
+              <a:buChar char="-"/>
+              <a:tabLst/>
+              <a:defRPr/>
+            </a:pPr>
+            <a:r>
+              <a:rPr lang="en-US" dirty="0"/>
+              <a:t>The largest % changes from adherence were</a:t>
+            </a:r>
+          </a:p>
+        </p:txBody>
+      </p:sp>
+      <p:sp>
+        <p:nvSpPr>
+          <p:cNvPr id="4" name="Slide Number Placeholder 3"/>
+          <p:cNvSpPr>
+            <a:spLocks noGrp="1"/>
+          </p:cNvSpPr>
+          <p:nvPr>
+            <p:ph type="sldNum" sz="quarter" idx="5"/>
+          </p:nvPr>
+        </p:nvSpPr>
+        <p:spPr/>
+        <p:txBody>
+          <a:bodyPr/>
+          <a:lstStyle/>
+          <a:p>
+            <a:fld id="{B18332F0-876C-42EC-A93C-C92102BDEA90}" type="slidenum">
+              <a:rPr lang="en-US" smtClean="0"/>
+              <a:t>5</a:t>
+            </a:fld>
+            <a:endParaRPr lang="en-US"/>
+          </a:p>
+        </p:txBody>
+      </p:sp>
+    </p:spTree>
+    <p:extLst>
+      <p:ext uri="{BB962C8B-B14F-4D97-AF65-F5344CB8AC3E}">
+        <p14:creationId xmlns:p14="http://schemas.microsoft.com/office/powerpoint/2010/main" val="581901061"/>
+      </p:ext>
+    </p:extLst>
+  </p:cSld>
+  <p:clrMapOvr>
+    <a:masterClrMapping/>
+  </p:clrMapOvr>
+</p:notes>
+</file>
+
+<file path=ppt/notesSlides/notesSlide5.xml><?xml version="1.0" encoding="utf-8"?>
+<p:notes xmlns:a="http://schemas.openxmlformats.org/drawingml/2006/main" xmlns:r="http://schemas.openxmlformats.org/officeDocument/2006/relationships" xmlns:p="http://schemas.openxmlformats.org/presentationml/2006/main">
+  <p:cSld>
+    <p:spTree>
+      <p:nvGrpSpPr>
+        <p:cNvPr id="1" name=""/>
+        <p:cNvGrpSpPr/>
+        <p:nvPr/>
+      </p:nvGrpSpPr>
+      <p:grpSpPr>
+        <a:xfrm>
+          <a:off x="0" y="0"/>
+          <a:ext cx="0" cy="0"/>
+          <a:chOff x="0" y="0"/>
+          <a:chExt cx="0" cy="0"/>
+        </a:xfrm>
+      </p:grpSpPr>
+      <p:sp>
+        <p:nvSpPr>
+          <p:cNvPr id="2" name="Slide Image Placeholder 1"/>
+          <p:cNvSpPr>
+            <a:spLocks noGrp="1" noRot="1" noChangeAspect="1"/>
+          </p:cNvSpPr>
+          <p:nvPr>
+            <p:ph type="sldImg"/>
+          </p:nvPr>
+        </p:nvSpPr>
+        <p:spPr/>
+      </p:sp>
+      <p:sp>
+        <p:nvSpPr>
+          <p:cNvPr id="3" name="Notes Placeholder 2"/>
+          <p:cNvSpPr>
+            <a:spLocks noGrp="1"/>
+          </p:cNvSpPr>
+          <p:nvPr>
+            <p:ph type="body" idx="1"/>
+          </p:nvPr>
+        </p:nvSpPr>
+        <p:spPr/>
+        <p:txBody>
+          <a:bodyPr/>
+          <a:lstStyle/>
+          <a:p>
+            <a:r>
+              <a:rPr lang="en-US" dirty="0"/>
+              <a:t>Grey rectangles represent the clinically significant differences by group. CD4 is well outside the range and physical quality of life is overlapping with intervals but not with point estimates, matching the previous conclusions.</a:t>
+            </a:r>
+          </a:p>
+        </p:txBody>
+      </p:sp>
+      <p:sp>
+        <p:nvSpPr>
+          <p:cNvPr id="4" name="Slide Number Placeholder 3"/>
+          <p:cNvSpPr>
+            <a:spLocks noGrp="1"/>
+          </p:cNvSpPr>
+          <p:nvPr>
+            <p:ph type="sldNum" sz="quarter" idx="5"/>
+          </p:nvPr>
+        </p:nvSpPr>
+        <p:spPr/>
+        <p:txBody>
+          <a:bodyPr/>
+          <a:lstStyle/>
+          <a:p>
+            <a:fld id="{B18332F0-876C-42EC-A93C-C92102BDEA90}" type="slidenum">
+              <a:rPr lang="en-US" smtClean="0"/>
+              <a:t>6</a:t>
+            </a:fld>
+            <a:endParaRPr lang="en-US"/>
+          </a:p>
+        </p:txBody>
+      </p:sp>
+    </p:spTree>
+    <p:extLst>
+      <p:ext uri="{BB962C8B-B14F-4D97-AF65-F5344CB8AC3E}">
+        <p14:creationId xmlns:p14="http://schemas.microsoft.com/office/powerpoint/2010/main" val="2364730607"/>
       </p:ext>
     </p:extLst>
   </p:cSld>
@@ -4731,8 +5058,8 @@
         </p:nvSpPr>
         <p:spPr>
           <a:xfrm>
-            <a:off x="6372811" y="5908519"/>
-            <a:ext cx="290464" cy="369332"/>
+            <a:off x="6344317" y="5684688"/>
+            <a:ext cx="290464" cy="646331"/>
           </a:xfrm>
           <a:prstGeom prst="rect">
             <a:avLst/>
@@ -4745,6 +5072,9 @@
           </a:bodyPr>
           <a:lstStyle/>
           <a:p>
+            <a:br>
+              <a:rPr lang="en-US" b="1" dirty="0"/>
+            </a:br>
             <a:r>
               <a:rPr lang="en-US" b="1" dirty="0"/>
               <a:t>*</a:t>
@@ -4994,7 +5324,7 @@
           <p:nvPr/>
         </p:nvPicPr>
         <p:blipFill>
-          <a:blip r:embed="rId2">
+          <a:blip r:embed="rId3">
             <a:extLst>
               <a:ext uri="{28A0092B-C50C-407E-A947-70E740481C1C}">
                 <a14:useLocalDpi xmlns:a14="http://schemas.microsoft.com/office/drawing/2010/main" val="0"/>
@@ -5031,7 +5361,7 @@
           <p:nvPr/>
         </p:nvPicPr>
         <p:blipFill>
-          <a:blip r:embed="rId3">
+          <a:blip r:embed="rId4">
             <a:extLst>
               <a:ext uri="{28A0092B-C50C-407E-A947-70E740481C1C}">
                 <a14:useLocalDpi xmlns:a14="http://schemas.microsoft.com/office/drawing/2010/main" val="0"/>
@@ -5250,7 +5580,7 @@
           </p:nvPr>
         </p:nvPicPr>
         <p:blipFill>
-          <a:blip r:embed="rId2">
+          <a:blip r:embed="rId3">
             <a:extLst>
               <a:ext uri="{28A0092B-C50C-407E-A947-70E740481C1C}">
                 <a14:useLocalDpi xmlns:a14="http://schemas.microsoft.com/office/drawing/2010/main" val="0"/>
@@ -5268,6 +5598,205 @@
           </a:xfrm>
         </p:spPr>
       </p:pic>
+      <p:sp>
+        <p:nvSpPr>
+          <p:cNvPr id="3" name="Content Placeholder 2">
+            <a:extLst>
+              <a:ext uri="{FF2B5EF4-FFF2-40B4-BE49-F238E27FC236}">
+                <a16:creationId xmlns:a16="http://schemas.microsoft.com/office/drawing/2014/main" id="{53376DF1-8DE5-D260-301B-8DBEDDB2F2E2}"/>
+              </a:ext>
+            </a:extLst>
+          </p:cNvPr>
+          <p:cNvSpPr txBox="1">
+            <a:spLocks/>
+          </p:cNvSpPr>
+          <p:nvPr/>
+        </p:nvSpPr>
+        <p:spPr>
+          <a:xfrm>
+            <a:off x="0" y="1690688"/>
+            <a:ext cx="3158836" cy="4802187"/>
+          </a:xfrm>
+          <a:prstGeom prst="rect">
+            <a:avLst/>
+          </a:prstGeom>
+        </p:spPr>
+        <p:txBody>
+          <a:bodyPr vert="horz" lIns="91440" tIns="45720" rIns="91440" bIns="45720" rtlCol="0">
+            <a:normAutofit/>
+          </a:bodyPr>
+          <a:lstStyle>
+            <a:lvl1pPr marL="228600" indent="-228600" algn="l" defTabSz="914400" rtl="0" eaLnBrk="1" latinLnBrk="0" hangingPunct="1">
+              <a:lnSpc>
+                <a:spcPct val="90000"/>
+              </a:lnSpc>
+              <a:spcBef>
+                <a:spcPts val="1000"/>
+              </a:spcBef>
+              <a:buFont typeface="Arial" panose="020B0604020202020204" pitchFamily="34" charset="0"/>
+              <a:buChar char="•"/>
+              <a:defRPr sz="2800" kern="1200">
+                <a:solidFill>
+                  <a:schemeClr val="tx1"/>
+                </a:solidFill>
+                <a:latin typeface="+mn-lt"/>
+                <a:ea typeface="+mn-ea"/>
+                <a:cs typeface="+mn-cs"/>
+              </a:defRPr>
+            </a:lvl1pPr>
+            <a:lvl2pPr marL="685800" indent="-228600" algn="l" defTabSz="914400" rtl="0" eaLnBrk="1" latinLnBrk="0" hangingPunct="1">
+              <a:lnSpc>
+                <a:spcPct val="90000"/>
+              </a:lnSpc>
+              <a:spcBef>
+                <a:spcPts val="500"/>
+              </a:spcBef>
+              <a:buFont typeface="Arial" panose="020B0604020202020204" pitchFamily="34" charset="0"/>
+              <a:buChar char="•"/>
+              <a:defRPr sz="2400" kern="1200">
+                <a:solidFill>
+                  <a:schemeClr val="tx1"/>
+                </a:solidFill>
+                <a:latin typeface="+mn-lt"/>
+                <a:ea typeface="+mn-ea"/>
+                <a:cs typeface="+mn-cs"/>
+              </a:defRPr>
+            </a:lvl2pPr>
+            <a:lvl3pPr marL="1143000" indent="-228600" algn="l" defTabSz="914400" rtl="0" eaLnBrk="1" latinLnBrk="0" hangingPunct="1">
+              <a:lnSpc>
+                <a:spcPct val="90000"/>
+              </a:lnSpc>
+              <a:spcBef>
+                <a:spcPts val="500"/>
+              </a:spcBef>
+              <a:buFont typeface="Arial" panose="020B0604020202020204" pitchFamily="34" charset="0"/>
+              <a:buChar char="•"/>
+              <a:defRPr sz="2000" kern="1200">
+                <a:solidFill>
+                  <a:schemeClr val="tx1"/>
+                </a:solidFill>
+                <a:latin typeface="+mn-lt"/>
+                <a:ea typeface="+mn-ea"/>
+                <a:cs typeface="+mn-cs"/>
+              </a:defRPr>
+            </a:lvl3pPr>
+            <a:lvl4pPr marL="1600200" indent="-228600" algn="l" defTabSz="914400" rtl="0" eaLnBrk="1" latinLnBrk="0" hangingPunct="1">
+              <a:lnSpc>
+                <a:spcPct val="90000"/>
+              </a:lnSpc>
+              <a:spcBef>
+                <a:spcPts val="500"/>
+              </a:spcBef>
+              <a:buFont typeface="Arial" panose="020B0604020202020204" pitchFamily="34" charset="0"/>
+              <a:buChar char="•"/>
+              <a:defRPr sz="1800" kern="1200">
+                <a:solidFill>
+                  <a:schemeClr val="tx1"/>
+                </a:solidFill>
+                <a:latin typeface="+mn-lt"/>
+                <a:ea typeface="+mn-ea"/>
+                <a:cs typeface="+mn-cs"/>
+              </a:defRPr>
+            </a:lvl4pPr>
+            <a:lvl5pPr marL="2057400" indent="-228600" algn="l" defTabSz="914400" rtl="0" eaLnBrk="1" latinLnBrk="0" hangingPunct="1">
+              <a:lnSpc>
+                <a:spcPct val="90000"/>
+              </a:lnSpc>
+              <a:spcBef>
+                <a:spcPts val="500"/>
+              </a:spcBef>
+              <a:buFont typeface="Arial" panose="020B0604020202020204" pitchFamily="34" charset="0"/>
+              <a:buChar char="•"/>
+              <a:defRPr sz="1800" kern="1200">
+                <a:solidFill>
+                  <a:schemeClr val="tx1"/>
+                </a:solidFill>
+                <a:latin typeface="+mn-lt"/>
+                <a:ea typeface="+mn-ea"/>
+                <a:cs typeface="+mn-cs"/>
+              </a:defRPr>
+            </a:lvl5pPr>
+            <a:lvl6pPr marL="2514600" indent="-228600" algn="l" defTabSz="914400" rtl="0" eaLnBrk="1" latinLnBrk="0" hangingPunct="1">
+              <a:lnSpc>
+                <a:spcPct val="90000"/>
+              </a:lnSpc>
+              <a:spcBef>
+                <a:spcPts val="500"/>
+              </a:spcBef>
+              <a:buFont typeface="Arial" panose="020B0604020202020204" pitchFamily="34" charset="0"/>
+              <a:buChar char="•"/>
+              <a:defRPr sz="1800" kern="1200">
+                <a:solidFill>
+                  <a:schemeClr val="tx1"/>
+                </a:solidFill>
+                <a:latin typeface="+mn-lt"/>
+                <a:ea typeface="+mn-ea"/>
+                <a:cs typeface="+mn-cs"/>
+              </a:defRPr>
+            </a:lvl6pPr>
+            <a:lvl7pPr marL="2971800" indent="-228600" algn="l" defTabSz="914400" rtl="0" eaLnBrk="1" latinLnBrk="0" hangingPunct="1">
+              <a:lnSpc>
+                <a:spcPct val="90000"/>
+              </a:lnSpc>
+              <a:spcBef>
+                <a:spcPts val="500"/>
+              </a:spcBef>
+              <a:buFont typeface="Arial" panose="020B0604020202020204" pitchFamily="34" charset="0"/>
+              <a:buChar char="•"/>
+              <a:defRPr sz="1800" kern="1200">
+                <a:solidFill>
+                  <a:schemeClr val="tx1"/>
+                </a:solidFill>
+                <a:latin typeface="+mn-lt"/>
+                <a:ea typeface="+mn-ea"/>
+                <a:cs typeface="+mn-cs"/>
+              </a:defRPr>
+            </a:lvl7pPr>
+            <a:lvl8pPr marL="3429000" indent="-228600" algn="l" defTabSz="914400" rtl="0" eaLnBrk="1" latinLnBrk="0" hangingPunct="1">
+              <a:lnSpc>
+                <a:spcPct val="90000"/>
+              </a:lnSpc>
+              <a:spcBef>
+                <a:spcPts val="500"/>
+              </a:spcBef>
+              <a:buFont typeface="Arial" panose="020B0604020202020204" pitchFamily="34" charset="0"/>
+              <a:buChar char="•"/>
+              <a:defRPr sz="1800" kern="1200">
+                <a:solidFill>
+                  <a:schemeClr val="tx1"/>
+                </a:solidFill>
+                <a:latin typeface="+mn-lt"/>
+                <a:ea typeface="+mn-ea"/>
+                <a:cs typeface="+mn-cs"/>
+              </a:defRPr>
+            </a:lvl8pPr>
+            <a:lvl9pPr marL="3886200" indent="-228600" algn="l" defTabSz="914400" rtl="0" eaLnBrk="1" latinLnBrk="0" hangingPunct="1">
+              <a:lnSpc>
+                <a:spcPct val="90000"/>
+              </a:lnSpc>
+              <a:spcBef>
+                <a:spcPts val="500"/>
+              </a:spcBef>
+              <a:buFont typeface="Arial" panose="020B0604020202020204" pitchFamily="34" charset="0"/>
+              <a:buChar char="•"/>
+              <a:defRPr sz="1800" kern="1200">
+                <a:solidFill>
+                  <a:schemeClr val="tx1"/>
+                </a:solidFill>
+                <a:latin typeface="+mn-lt"/>
+                <a:ea typeface="+mn-ea"/>
+                <a:cs typeface="+mn-cs"/>
+              </a:defRPr>
+            </a:lvl9pPr>
+          </a:lstStyle>
+          <a:p>
+            <a:r>
+              <a:rPr lang="en-US" dirty="0"/>
+              <a:t>Strong agreement across models</a:t>
+            </a:r>
+          </a:p>
+        </p:txBody>
+      </p:sp>
     </p:spTree>
     <p:extLst>
       <p:ext uri="{BB962C8B-B14F-4D97-AF65-F5344CB8AC3E}">

--- a/P1/Dissemination/P1_Presentation.pptx
+++ b/P1/Dissemination/P1_Presentation.pptx
@@ -124,7 +124,7 @@
 <file path=ppt/revisionInfo.xml><?xml version="1.0" encoding="utf-8"?>
 <p1510:revInfo xmlns:a="http://schemas.openxmlformats.org/drawingml/2006/main" xmlns:r="http://schemas.openxmlformats.org/officeDocument/2006/relationships" xmlns:p1510="http://schemas.microsoft.com/office/powerpoint/2015/10/main">
   <p1510:revLst>
-    <p1510:client id="{D8AA4D66-65EB-4A1D-819D-11B87478C751}" v="17" dt="2026-03-02T07:00:50.480"/>
+    <p1510:client id="{D8AA4D66-65EB-4A1D-819D-11B87478C751}" v="20" dt="2026-03-02T18:03:38.263"/>
   </p1510:revLst>
 </p1510:revInfo>
 </file>
@@ -134,7 +134,7 @@
   <pc:docChgLst>
     <pc:chgData name="Ezra Weible" userId="67bcaf2f89c4552e" providerId="LiveId" clId="{E4E19776-AA89-4579-B0CB-50FEF10C4E93}"/>
     <pc:docChg chg="undo redo custSel addSld delSld modSld">
-      <pc:chgData name="Ezra Weible" userId="67bcaf2f89c4552e" providerId="LiveId" clId="{E4E19776-AA89-4579-B0CB-50FEF10C4E93}" dt="2026-03-02T07:02:21.700" v="3054" actId="20577"/>
+      <pc:chgData name="Ezra Weible" userId="67bcaf2f89c4552e" providerId="LiveId" clId="{E4E19776-AA89-4579-B0CB-50FEF10C4E93}" dt="2026-03-02T18:03:38.263" v="3066"/>
       <pc:docMkLst>
         <pc:docMk/>
       </pc:docMkLst>
@@ -177,7 +177,7 @@
         </pc:picChg>
       </pc:sldChg>
       <pc:sldChg chg="addSp delSp modSp add mod modNotesTx">
-        <pc:chgData name="Ezra Weible" userId="67bcaf2f89c4552e" providerId="LiveId" clId="{E4E19776-AA89-4579-B0CB-50FEF10C4E93}" dt="2026-03-02T06:47:08.575" v="1905" actId="20577"/>
+        <pc:chgData name="Ezra Weible" userId="67bcaf2f89c4552e" providerId="LiveId" clId="{E4E19776-AA89-4579-B0CB-50FEF10C4E93}" dt="2026-03-02T18:02:53.900" v="3057" actId="1076"/>
         <pc:sldMkLst>
           <pc:docMk/>
           <pc:sldMk cId="3886421937" sldId="258"/>
@@ -190,12 +190,20 @@
             <ac:spMk id="3" creationId="{3DDEC1C9-F0BB-944E-104A-1C46C5D25AF4}"/>
           </ac:spMkLst>
         </pc:spChg>
-        <pc:picChg chg="add mod">
-          <ac:chgData name="Ezra Weible" userId="67bcaf2f89c4552e" providerId="LiveId" clId="{E4E19776-AA89-4579-B0CB-50FEF10C4E93}" dt="2026-03-02T06:10:23.602" v="170" actId="1076"/>
+        <pc:picChg chg="add del mod">
+          <ac:chgData name="Ezra Weible" userId="67bcaf2f89c4552e" providerId="LiveId" clId="{E4E19776-AA89-4579-B0CB-50FEF10C4E93}" dt="2026-03-02T18:02:34.438" v="3055" actId="478"/>
           <ac:picMkLst>
             <pc:docMk/>
             <pc:sldMk cId="3886421937" sldId="258"/>
             <ac:picMk id="5" creationId="{688A30CA-B1A8-8A5E-38F6-F3D88EB2C501}"/>
+          </ac:picMkLst>
+        </pc:picChg>
+        <pc:picChg chg="add mod">
+          <ac:chgData name="Ezra Weible" userId="67bcaf2f89c4552e" providerId="LiveId" clId="{E4E19776-AA89-4579-B0CB-50FEF10C4E93}" dt="2026-03-02T18:02:53.900" v="3057" actId="1076"/>
+          <ac:picMkLst>
+            <pc:docMk/>
+            <pc:sldMk cId="3886421937" sldId="258"/>
+            <ac:picMk id="6" creationId="{72A2132F-682C-7649-E642-D8CF72185C60}"/>
           </ac:picMkLst>
         </pc:picChg>
         <pc:picChg chg="del">
@@ -293,8 +301,8 @@
           </ac:picMkLst>
         </pc:picChg>
       </pc:sldChg>
-      <pc:sldChg chg="addSp delSp modSp new mod modAnim modNotesTx">
-        <pc:chgData name="Ezra Weible" userId="67bcaf2f89c4552e" providerId="LiveId" clId="{E4E19776-AA89-4579-B0CB-50FEF10C4E93}" dt="2026-03-02T06:52:06.804" v="2694" actId="20577"/>
+      <pc:sldChg chg="addSp delSp modSp new mod delAnim modAnim modNotesTx">
+        <pc:chgData name="Ezra Weible" userId="67bcaf2f89c4552e" providerId="LiveId" clId="{E4E19776-AA89-4579-B0CB-50FEF10C4E93}" dt="2026-03-02T18:03:38.263" v="3066"/>
         <pc:sldMkLst>
           <pc:docMk/>
           <pc:sldMk cId="3421660498" sldId="261"/>
@@ -323,20 +331,36 @@
             <ac:spMk id="8" creationId="{E0B6ED8A-E67E-B8F5-16BB-5BF975943A7A}"/>
           </ac:spMkLst>
         </pc:spChg>
-        <pc:picChg chg="add mod modCrop">
-          <ac:chgData name="Ezra Weible" userId="67bcaf2f89c4552e" providerId="LiveId" clId="{E4E19776-AA89-4579-B0CB-50FEF10C4E93}" dt="2026-03-02T06:19:41.050" v="991" actId="14100"/>
+        <pc:picChg chg="add mod">
+          <ac:chgData name="Ezra Weible" userId="67bcaf2f89c4552e" providerId="LiveId" clId="{E4E19776-AA89-4579-B0CB-50FEF10C4E93}" dt="2026-03-02T18:03:33.126" v="3065" actId="14100"/>
+          <ac:picMkLst>
+            <pc:docMk/>
+            <pc:sldMk cId="3421660498" sldId="261"/>
+            <ac:picMk id="4" creationId="{3BC8F1A8-A1F2-83A3-E59A-EC8BBC07D73B}"/>
+          </ac:picMkLst>
+        </pc:picChg>
+        <pc:picChg chg="add del mod modCrop">
+          <ac:chgData name="Ezra Weible" userId="67bcaf2f89c4552e" providerId="LiveId" clId="{E4E19776-AA89-4579-B0CB-50FEF10C4E93}" dt="2026-03-02T18:03:02.364" v="3059" actId="478"/>
           <ac:picMkLst>
             <pc:docMk/>
             <pc:sldMk cId="3421660498" sldId="261"/>
             <ac:picMk id="5" creationId="{AD272D68-9BF5-ACD2-A9CF-64A8A6F4DBA2}"/>
           </ac:picMkLst>
         </pc:picChg>
-        <pc:picChg chg="add mod modCrop">
-          <ac:chgData name="Ezra Weible" userId="67bcaf2f89c4552e" providerId="LiveId" clId="{E4E19776-AA89-4579-B0CB-50FEF10C4E93}" dt="2026-03-02T06:20:14.358" v="995" actId="1076"/>
+        <pc:picChg chg="add del mod modCrop">
+          <ac:chgData name="Ezra Weible" userId="67bcaf2f89c4552e" providerId="LiveId" clId="{E4E19776-AA89-4579-B0CB-50FEF10C4E93}" dt="2026-03-02T18:03:01.840" v="3058" actId="478"/>
           <ac:picMkLst>
             <pc:docMk/>
             <pc:sldMk cId="3421660498" sldId="261"/>
             <ac:picMk id="7" creationId="{868F9F09-9E85-2651-71D6-7593B2A9A4A2}"/>
+          </ac:picMkLst>
+        </pc:picChg>
+        <pc:picChg chg="add mod">
+          <ac:chgData name="Ezra Weible" userId="67bcaf2f89c4552e" providerId="LiveId" clId="{E4E19776-AA89-4579-B0CB-50FEF10C4E93}" dt="2026-03-02T18:03:23.826" v="3064" actId="1076"/>
+          <ac:picMkLst>
+            <pc:docMk/>
+            <pc:sldMk cId="3421660498" sldId="261"/>
+            <ac:picMk id="9" creationId="{00FB87A4-003E-9585-3627-597978215511}"/>
           </ac:picMkLst>
         </pc:picChg>
       </pc:sldChg>
@@ -489,7 +513,7 @@
           <a:p>
             <a:fld id="{03A0EFA4-960B-4904-885A-CF0C95618E09}" type="datetimeFigureOut">
               <a:rPr lang="en-US" smtClean="0"/>
-              <a:t>3/1/2026</a:t>
+              <a:t>3/2/2026</a:t>
             </a:fld>
             <a:endParaRPr lang="en-US"/>
           </a:p>
@@ -1461,7 +1485,7 @@
           <a:p>
             <a:fld id="{81C4AEBB-EB7F-487C-A8ED-8DBAC0E887FE}" type="datetimeFigureOut">
               <a:rPr lang="en-US" smtClean="0"/>
-              <a:t>3/1/2026</a:t>
+              <a:t>3/2/2026</a:t>
             </a:fld>
             <a:endParaRPr lang="en-US"/>
           </a:p>
@@ -1659,7 +1683,7 @@
           <a:p>
             <a:fld id="{81C4AEBB-EB7F-487C-A8ED-8DBAC0E887FE}" type="datetimeFigureOut">
               <a:rPr lang="en-US" smtClean="0"/>
-              <a:t>3/1/2026</a:t>
+              <a:t>3/2/2026</a:t>
             </a:fld>
             <a:endParaRPr lang="en-US"/>
           </a:p>
@@ -1867,7 +1891,7 @@
           <a:p>
             <a:fld id="{81C4AEBB-EB7F-487C-A8ED-8DBAC0E887FE}" type="datetimeFigureOut">
               <a:rPr lang="en-US" smtClean="0"/>
-              <a:t>3/1/2026</a:t>
+              <a:t>3/2/2026</a:t>
             </a:fld>
             <a:endParaRPr lang="en-US"/>
           </a:p>
@@ -2065,7 +2089,7 @@
           <a:p>
             <a:fld id="{81C4AEBB-EB7F-487C-A8ED-8DBAC0E887FE}" type="datetimeFigureOut">
               <a:rPr lang="en-US" smtClean="0"/>
-              <a:t>3/1/2026</a:t>
+              <a:t>3/2/2026</a:t>
             </a:fld>
             <a:endParaRPr lang="en-US"/>
           </a:p>
@@ -2340,7 +2364,7 @@
           <a:p>
             <a:fld id="{81C4AEBB-EB7F-487C-A8ED-8DBAC0E887FE}" type="datetimeFigureOut">
               <a:rPr lang="en-US" smtClean="0"/>
-              <a:t>3/1/2026</a:t>
+              <a:t>3/2/2026</a:t>
             </a:fld>
             <a:endParaRPr lang="en-US"/>
           </a:p>
@@ -2605,7 +2629,7 @@
           <a:p>
             <a:fld id="{81C4AEBB-EB7F-487C-A8ED-8DBAC0E887FE}" type="datetimeFigureOut">
               <a:rPr lang="en-US" smtClean="0"/>
-              <a:t>3/1/2026</a:t>
+              <a:t>3/2/2026</a:t>
             </a:fld>
             <a:endParaRPr lang="en-US"/>
           </a:p>
@@ -3017,7 +3041,7 @@
           <a:p>
             <a:fld id="{81C4AEBB-EB7F-487C-A8ED-8DBAC0E887FE}" type="datetimeFigureOut">
               <a:rPr lang="en-US" smtClean="0"/>
-              <a:t>3/1/2026</a:t>
+              <a:t>3/2/2026</a:t>
             </a:fld>
             <a:endParaRPr lang="en-US"/>
           </a:p>
@@ -3158,7 +3182,7 @@
           <a:p>
             <a:fld id="{81C4AEBB-EB7F-487C-A8ED-8DBAC0E887FE}" type="datetimeFigureOut">
               <a:rPr lang="en-US" smtClean="0"/>
-              <a:t>3/1/2026</a:t>
+              <a:t>3/2/2026</a:t>
             </a:fld>
             <a:endParaRPr lang="en-US"/>
           </a:p>
@@ -3271,7 +3295,7 @@
           <a:p>
             <a:fld id="{81C4AEBB-EB7F-487C-A8ED-8DBAC0E887FE}" type="datetimeFigureOut">
               <a:rPr lang="en-US" smtClean="0"/>
-              <a:t>3/1/2026</a:t>
+              <a:t>3/2/2026</a:t>
             </a:fld>
             <a:endParaRPr lang="en-US"/>
           </a:p>
@@ -3582,7 +3606,7 @@
           <a:p>
             <a:fld id="{81C4AEBB-EB7F-487C-A8ED-8DBAC0E887FE}" type="datetimeFigureOut">
               <a:rPr lang="en-US" smtClean="0"/>
-              <a:t>3/1/2026</a:t>
+              <a:t>3/2/2026</a:t>
             </a:fld>
             <a:endParaRPr lang="en-US"/>
           </a:p>
@@ -3870,7 +3894,7 @@
           <a:p>
             <a:fld id="{81C4AEBB-EB7F-487C-A8ED-8DBAC0E887FE}" type="datetimeFigureOut">
               <a:rPr lang="en-US" smtClean="0"/>
-              <a:t>3/1/2026</a:t>
+              <a:t>3/2/2026</a:t>
             </a:fld>
             <a:endParaRPr lang="en-US"/>
           </a:p>
@@ -4111,7 +4135,7 @@
           <a:p>
             <a:fld id="{81C4AEBB-EB7F-487C-A8ED-8DBAC0E887FE}" type="datetimeFigureOut">
               <a:rPr lang="en-US" smtClean="0"/>
-              <a:t>3/1/2026</a:t>
+              <a:t>3/2/2026</a:t>
             </a:fld>
             <a:endParaRPr lang="en-US"/>
           </a:p>
@@ -4713,10 +4737,10 @@
       </p:sp>
       <p:pic>
         <p:nvPicPr>
-          <p:cNvPr id="5" name="Picture 4">
-            <a:extLst>
-              <a:ext uri="{FF2B5EF4-FFF2-40B4-BE49-F238E27FC236}">
-                <a16:creationId xmlns:a16="http://schemas.microsoft.com/office/drawing/2014/main" id="{688A30CA-B1A8-8A5E-38F6-F3D88EB2C501}"/>
+          <p:cNvPr id="6" name="Picture 5">
+            <a:extLst>
+              <a:ext uri="{FF2B5EF4-FFF2-40B4-BE49-F238E27FC236}">
+                <a16:creationId xmlns:a16="http://schemas.microsoft.com/office/drawing/2014/main" id="{72A2132F-682C-7649-E642-D8CF72185C60}"/>
               </a:ext>
             </a:extLst>
           </p:cNvPr>
@@ -4739,7 +4763,7 @@
         </p:blipFill>
         <p:spPr>
           <a:xfrm>
-            <a:off x="5142889" y="1329802"/>
+            <a:off x="5142889" y="1462572"/>
             <a:ext cx="7049111" cy="5395428"/>
           </a:xfrm>
           <a:prstGeom prst="rect">
@@ -5309,12 +5333,59 @@
           </a:p>
         </p:txBody>
       </p:sp>
+      <p:sp>
+        <p:nvSpPr>
+          <p:cNvPr id="8" name="Content Placeholder 2">
+            <a:extLst>
+              <a:ext uri="{FF2B5EF4-FFF2-40B4-BE49-F238E27FC236}">
+                <a16:creationId xmlns:a16="http://schemas.microsoft.com/office/drawing/2014/main" id="{E0B6ED8A-E67E-B8F5-16BB-5BF975943A7A}"/>
+              </a:ext>
+            </a:extLst>
+          </p:cNvPr>
+          <p:cNvSpPr>
+            <a:spLocks noGrp="1"/>
+          </p:cNvSpPr>
+          <p:nvPr>
+            <p:ph idx="1"/>
+          </p:nvPr>
+        </p:nvSpPr>
+        <p:spPr>
+          <a:xfrm>
+            <a:off x="0" y="1690688"/>
+            <a:ext cx="3158836" cy="4802187"/>
+          </a:xfrm>
+        </p:spPr>
+        <p:txBody>
+          <a:bodyPr>
+            <a:normAutofit lnSpcReduction="10000"/>
+          </a:bodyPr>
+          <a:lstStyle/>
+          <a:p>
+            <a:r>
+              <a:rPr lang="en-US" dirty="0"/>
+              <a:t>Strong evidence of lower CD4 counts among hard drug users</a:t>
+            </a:r>
+          </a:p>
+          <a:p>
+            <a:r>
+              <a:rPr lang="en-US" dirty="0"/>
+              <a:t>Moderate evidence of lower physical quality of life among hard drug users</a:t>
+            </a:r>
+          </a:p>
+          <a:p>
+            <a:r>
+              <a:rPr lang="en-US" dirty="0"/>
+              <a:t>Adherence adjustment did not change any conclusions</a:t>
+            </a:r>
+          </a:p>
+        </p:txBody>
+      </p:sp>
       <p:pic>
         <p:nvPicPr>
-          <p:cNvPr id="5" name="Picture 4">
-            <a:extLst>
-              <a:ext uri="{FF2B5EF4-FFF2-40B4-BE49-F238E27FC236}">
-                <a16:creationId xmlns:a16="http://schemas.microsoft.com/office/drawing/2014/main" id="{AD272D68-9BF5-ACD2-A9CF-64A8A6F4DBA2}"/>
+          <p:cNvPr id="4" name="Picture 3">
+            <a:extLst>
+              <a:ext uri="{FF2B5EF4-FFF2-40B4-BE49-F238E27FC236}">
+                <a16:creationId xmlns:a16="http://schemas.microsoft.com/office/drawing/2014/main" id="{3BC8F1A8-A1F2-83A3-E59A-EC8BBC07D73B}"/>
               </a:ext>
             </a:extLst>
           </p:cNvPr>
@@ -5331,15 +5402,14 @@
               </a:ext>
             </a:extLst>
           </a:blip>
-          <a:srcRect b="19713"/>
           <a:stretch>
             <a:fillRect/>
           </a:stretch>
         </p:blipFill>
         <p:spPr>
           <a:xfrm>
-            <a:off x="3158836" y="963119"/>
-            <a:ext cx="9033164" cy="5876638"/>
+            <a:off x="5177352" y="1174044"/>
+            <a:ext cx="7014648" cy="5683956"/>
           </a:xfrm>
           <a:prstGeom prst="rect">
             <a:avLst/>
@@ -5348,10 +5418,10 @@
       </p:pic>
       <p:pic>
         <p:nvPicPr>
-          <p:cNvPr id="7" name="Picture 6">
-            <a:extLst>
-              <a:ext uri="{FF2B5EF4-FFF2-40B4-BE49-F238E27FC236}">
-                <a16:creationId xmlns:a16="http://schemas.microsoft.com/office/drawing/2014/main" id="{868F9F09-9E85-2651-71D6-7593B2A9A4A2}"/>
+          <p:cNvPr id="9" name="Picture 8">
+            <a:extLst>
+              <a:ext uri="{FF2B5EF4-FFF2-40B4-BE49-F238E27FC236}">
+                <a16:creationId xmlns:a16="http://schemas.microsoft.com/office/drawing/2014/main" id="{00FB87A4-003E-9585-3627-597978215511}"/>
               </a:ext>
             </a:extLst>
           </p:cNvPr>
@@ -5368,68 +5438,20 @@
               </a:ext>
             </a:extLst>
           </a:blip>
-          <a:srcRect b="21758"/>
           <a:stretch>
             <a:fillRect/>
           </a:stretch>
         </p:blipFill>
         <p:spPr>
           <a:xfrm>
-            <a:off x="3158836" y="-18243"/>
-            <a:ext cx="9033164" cy="6876243"/>
+            <a:off x="5162550" y="19050"/>
+            <a:ext cx="7029450" cy="6838950"/>
           </a:xfrm>
           <a:prstGeom prst="rect">
             <a:avLst/>
           </a:prstGeom>
         </p:spPr>
       </p:pic>
-      <p:sp>
-        <p:nvSpPr>
-          <p:cNvPr id="8" name="Content Placeholder 2">
-            <a:extLst>
-              <a:ext uri="{FF2B5EF4-FFF2-40B4-BE49-F238E27FC236}">
-                <a16:creationId xmlns:a16="http://schemas.microsoft.com/office/drawing/2014/main" id="{E0B6ED8A-E67E-B8F5-16BB-5BF975943A7A}"/>
-              </a:ext>
-            </a:extLst>
-          </p:cNvPr>
-          <p:cNvSpPr>
-            <a:spLocks noGrp="1"/>
-          </p:cNvSpPr>
-          <p:nvPr>
-            <p:ph idx="1"/>
-          </p:nvPr>
-        </p:nvSpPr>
-        <p:spPr>
-          <a:xfrm>
-            <a:off x="0" y="1690688"/>
-            <a:ext cx="3158836" cy="4802187"/>
-          </a:xfrm>
-        </p:spPr>
-        <p:txBody>
-          <a:bodyPr>
-            <a:normAutofit lnSpcReduction="10000"/>
-          </a:bodyPr>
-          <a:lstStyle/>
-          <a:p>
-            <a:r>
-              <a:rPr lang="en-US" dirty="0"/>
-              <a:t>Strong evidence of lower CD4 counts among hard drug users</a:t>
-            </a:r>
-          </a:p>
-          <a:p>
-            <a:r>
-              <a:rPr lang="en-US" dirty="0"/>
-              <a:t>Moderate evidence of lower physical quality of life among hard drug users</a:t>
-            </a:r>
-          </a:p>
-          <a:p>
-            <a:r>
-              <a:rPr lang="en-US" dirty="0"/>
-              <a:t>Adherence adjustment did not change any conclusions</a:t>
-            </a:r>
-          </a:p>
-        </p:txBody>
-      </p:sp>
     </p:spTree>
     <p:extLst>
       <p:ext uri="{BB962C8B-B14F-4D97-AF65-F5344CB8AC3E}">
@@ -5474,7 +5496,7 @@
                                           </p:stCondLst>
                                         </p:cTn>
                                         <p:tgtEl>
-                                          <p:spTgt spid="7"/>
+                                          <p:spTgt spid="9"/>
                                         </p:tgtEl>
                                         <p:attrNameLst>
                                           <p:attrName>style.visibility</p:attrName>
